--- a/pythonpra/myproject/ppt/assistant_process.pptx
+++ b/pythonpra/myproject/ppt/assistant_process.pptx
@@ -1394,7 +1394,7 @@
           <a:p>
             <a:r>
               <a:rPr lang="en-US" dirty="0"/>
-              <a:t>[0:50 / 누적 5:30] 구현하며 이해한 것 1. 로그로 확인했더니 손을 돌릴 때 손가락이 겹쳐 보인 것이 원인이었다. 추측한 원인과 실제 원인이 달랐다.</a:t>
+              <a:t>[0:50 / 누적 5:30] 구현하며 이해한 것 1. 클릭이 계속 발동해서 로그를 남겨 확인했다. 손을 정면에서 옆으로, 뒤로 돌리는 동안 엄지–중지 거리가 0.17에서 0.003까지 떨어졌다. 실제로 붙인 게 아니라 2D 화면에서 손가락이 겹쳐 보인 것이었다. 추측한 원인과 실제 원인이 달랐다.</a:t>
             </a:r>
             <a:endParaRPr lang="en-US" dirty="0"/>
           </a:p>
@@ -2139,12 +2139,12 @@
         </p:nvSpPr>
         <p:spPr>
           <a:xfrm>
-            <a:off x="7680960" y="365760"/>
-            <a:ext cx="3931920" cy="1051560"/>
+            <a:off x="548640" y="1828800"/>
+            <a:ext cx="4206240" cy="4206240"/>
           </a:xfrm>
           <a:prstGeom prst="roundRect">
             <a:avLst>
-              <a:gd name="adj" fmla="val 6957"/>
+              <a:gd name="adj" fmla="val 1739"/>
             </a:avLst>
           </a:prstGeom>
           <a:solidFill>
@@ -2166,8 +2166,8 @@
         </p:nvSpPr>
         <p:spPr>
           <a:xfrm>
-            <a:off x="7955280" y="502920"/>
-            <a:ext cx="3383280" cy="274320"/>
+            <a:off x="822960" y="2103120"/>
+            <a:ext cx="3657600" cy="365760"/>
           </a:xfrm>
           <a:prstGeom prst="rect">
             <a:avLst/>
@@ -2183,7 +2183,7 @@
               <a:buNone/>
             </a:pPr>
             <a:r>
-              <a:rPr lang="en-US" sz="1300" b="1" dirty="0">
+              <a:rPr lang="en-US" sz="1500" b="1" dirty="0">
                 <a:solidFill>
                   <a:srgbClr val="F2B8B2"/>
                 </a:solidFill>
@@ -2193,7 +2193,7 @@
               </a:rPr>
               <a:t>사용 라이브러리</a:t>
             </a:r>
-            <a:endParaRPr lang="en-US" sz="1300" dirty="0"/>
+            <a:endParaRPr lang="en-US" sz="1500" dirty="0"/>
           </a:p>
         </p:txBody>
       </p:sp>
@@ -2205,8 +2205,8 @@
         </p:nvSpPr>
         <p:spPr>
           <a:xfrm>
-            <a:off x="7955280" y="777240"/>
-            <a:ext cx="3383280" cy="365760"/>
+            <a:off x="822960" y="2514600"/>
+            <a:ext cx="3657600" cy="822960"/>
           </a:xfrm>
           <a:prstGeom prst="rect">
             <a:avLst/>
@@ -2222,7 +2222,7 @@
               <a:buNone/>
             </a:pPr>
             <a:r>
-              <a:rPr lang="en-US" sz="1800" b="1" dirty="0">
+              <a:rPr lang="en-US" sz="2000" b="1" dirty="0">
                 <a:solidFill>
                   <a:srgbClr val="FFFFFF"/>
                 </a:solidFill>
@@ -2232,7 +2232,7 @@
               </a:rPr>
               <a:t>MediaPipe Face Mesh</a:t>
             </a:r>
-            <a:endParaRPr lang="en-US" sz="1800" dirty="0"/>
+            <a:endParaRPr lang="en-US" sz="2000" dirty="0"/>
           </a:p>
         </p:txBody>
       </p:sp>
@@ -2244,8 +2244,8 @@
         </p:nvSpPr>
         <p:spPr>
           <a:xfrm>
-            <a:off x="7955280" y="1115568"/>
-            <a:ext cx="3383280" cy="228600"/>
+            <a:off x="822960" y="3566160"/>
+            <a:ext cx="3657600" cy="365760"/>
           </a:xfrm>
           <a:prstGeom prst="rect">
             <a:avLst/>
@@ -2261,7 +2261,46 @@
               <a:buNone/>
             </a:pPr>
             <a:r>
-              <a:rPr lang="en-US" sz="1200" dirty="0">
+              <a:rPr lang="en-US" sz="1500" b="1" dirty="0">
+                <a:solidFill>
+                  <a:srgbClr val="9ADBC6"/>
+                </a:solidFill>
+                <a:latin typeface="Malgun Gothic" pitchFamily="34" charset="0"/>
+                <a:ea typeface="Malgun Gothic" pitchFamily="34" charset="-122"/>
+                <a:cs typeface="Malgun Gothic" pitchFamily="34" charset="-120"/>
+              </a:rPr>
+              <a:t>도입 이유</a:t>
+            </a:r>
+            <a:endParaRPr lang="en-US" sz="1500" dirty="0"/>
+          </a:p>
+        </p:txBody>
+      </p:sp>
+      <p:sp>
+        <p:nvSpPr>
+          <p:cNvPr id="8" name="Text 5"/>
+          <p:cNvSpPr txBox="1"/>
+          <p:nvPr/>
+        </p:nvSpPr>
+        <p:spPr>
+          <a:xfrm>
+            <a:off x="822960" y="3977640"/>
+            <a:ext cx="3657600" cy="1828800"/>
+          </a:xfrm>
+          <a:prstGeom prst="rect">
+            <a:avLst/>
+          </a:prstGeom>
+          <a:noFill/>
+          <a:ln/>
+        </p:spPr>
+        <p:txBody>
+          <a:bodyPr wrap="square" lIns="0" tIns="0" rIns="0" bIns="0" rtlCol="0" anchor="t"/>
+          <a:lstStyle/>
+          <a:p>
+            <a:pPr indent="0" marL="0">
+              <a:buNone/>
+            </a:pPr>
+            <a:r>
+              <a:rPr lang="en-US" sz="1500" dirty="0">
                 <a:solidFill>
                   <a:srgbClr val="C9D0DD"/>
                 </a:solidFill>
@@ -2269,26 +2308,26 @@
                 <a:ea typeface="Malgun Gothic" pitchFamily="34" charset="-122"/>
                 <a:cs typeface="Malgun Gothic" pitchFamily="34" charset="-120"/>
               </a:rPr>
-              <a:t>눈 비율(EAR)은 직접 계산</a:t>
-            </a:r>
-            <a:endParaRPr lang="en-US" sz="1200" dirty="0"/>
-          </a:p>
-        </p:txBody>
-      </p:sp>
-      <p:sp>
-        <p:nvSpPr>
-          <p:cNvPr id="8" name="Shape 5"/>
+              <a:t>같은 MediaPipe로 눈 감김 비율(EAR) 계산.</a:t>
+            </a:r>
+            <a:endParaRPr lang="en-US" sz="1500" dirty="0"/>
+          </a:p>
+        </p:txBody>
+      </p:sp>
+      <p:sp>
+        <p:nvSpPr>
+          <p:cNvPr id="9" name="Shape 6"/>
           <p:cNvSpPr/>
           <p:nvPr/>
         </p:nvSpPr>
         <p:spPr>
           <a:xfrm>
-            <a:off x="548640" y="2103120"/>
-            <a:ext cx="3474720" cy="2743200"/>
+            <a:off x="5029200" y="1828800"/>
+            <a:ext cx="6583680" cy="1280160"/>
           </a:xfrm>
           <a:prstGeom prst="roundRect">
             <a:avLst>
-              <a:gd name="adj" fmla="val 2667"/>
+              <a:gd name="adj" fmla="val 5714"/>
             </a:avLst>
           </a:prstGeom>
           <a:solidFill>
@@ -2311,14 +2350,14 @@
       </p:sp>
       <p:sp>
         <p:nvSpPr>
-          <p:cNvPr id="9" name="Text 6"/>
+          <p:cNvPr id="10" name="Text 7"/>
           <p:cNvSpPr txBox="1"/>
           <p:nvPr/>
         </p:nvSpPr>
         <p:spPr>
           <a:xfrm>
-            <a:off x="822960" y="2423160"/>
-            <a:ext cx="2926080" cy="2194560"/>
+            <a:off x="5257800" y="1965960"/>
+            <a:ext cx="6126480" cy="1005840"/>
           </a:xfrm>
           <a:prstGeom prst="rect">
             <a:avLst/>
@@ -2337,7 +2376,7 @@
               <a:buNone/>
             </a:pPr>
             <a:r>
-              <a:rPr lang="en-US" sz="1700" b="1" dirty="0">
+              <a:rPr lang="en-US" sz="1800" b="1" dirty="0">
                 <a:solidFill>
                   <a:srgbClr val="6A7384"/>
                 </a:solidFill>
@@ -2373,18 +2412,18 @@
       </p:sp>
       <p:sp>
         <p:nvSpPr>
-          <p:cNvPr id="10" name="Shape 7"/>
+          <p:cNvPr id="11" name="Shape 8"/>
           <p:cNvSpPr/>
           <p:nvPr/>
         </p:nvSpPr>
         <p:spPr>
           <a:xfrm>
-            <a:off x="4343400" y="2103120"/>
-            <a:ext cx="3474720" cy="2743200"/>
+            <a:off x="5029200" y="3246120"/>
+            <a:ext cx="6583680" cy="1280160"/>
           </a:xfrm>
           <a:prstGeom prst="roundRect">
             <a:avLst>
-              <a:gd name="adj" fmla="val 2667"/>
+              <a:gd name="adj" fmla="val 5714"/>
             </a:avLst>
           </a:prstGeom>
           <a:solidFill>
@@ -2400,14 +2439,14 @@
       </p:sp>
       <p:sp>
         <p:nvSpPr>
-          <p:cNvPr id="11" name="Text 8"/>
+          <p:cNvPr id="12" name="Text 9"/>
           <p:cNvSpPr txBox="1"/>
           <p:nvPr/>
         </p:nvSpPr>
         <p:spPr>
           <a:xfrm>
-            <a:off x="4617720" y="2423160"/>
-            <a:ext cx="2926080" cy="2194560"/>
+            <a:off x="5257800" y="3383280"/>
+            <a:ext cx="6126480" cy="1005840"/>
           </a:xfrm>
           <a:prstGeom prst="rect">
             <a:avLst/>
@@ -2426,7 +2465,7 @@
               <a:buNone/>
             </a:pPr>
             <a:r>
-              <a:rPr lang="en-US" sz="1700" b="1" dirty="0">
+              <a:rPr lang="en-US" sz="1800" b="1" dirty="0">
                 <a:solidFill>
                   <a:srgbClr val="C8443A"/>
                 </a:solidFill>
@@ -2462,18 +2501,18 @@
       </p:sp>
       <p:sp>
         <p:nvSpPr>
-          <p:cNvPr id="12" name="Shape 9"/>
+          <p:cNvPr id="13" name="Shape 10"/>
           <p:cNvSpPr/>
           <p:nvPr/>
         </p:nvSpPr>
         <p:spPr>
           <a:xfrm>
-            <a:off x="8138160" y="2103120"/>
-            <a:ext cx="3474720" cy="2743200"/>
+            <a:off x="5029200" y="4663440"/>
+            <a:ext cx="6583680" cy="1280160"/>
           </a:xfrm>
           <a:prstGeom prst="roundRect">
             <a:avLst>
-              <a:gd name="adj" fmla="val 2667"/>
+              <a:gd name="adj" fmla="val 5714"/>
             </a:avLst>
           </a:prstGeom>
           <a:solidFill>
@@ -2489,14 +2528,14 @@
       </p:sp>
       <p:sp>
         <p:nvSpPr>
-          <p:cNvPr id="13" name="Text 10"/>
+          <p:cNvPr id="14" name="Text 11"/>
           <p:cNvSpPr txBox="1"/>
           <p:nvPr/>
         </p:nvSpPr>
         <p:spPr>
           <a:xfrm>
-            <a:off x="8412480" y="2423160"/>
-            <a:ext cx="2926080" cy="2194560"/>
+            <a:off x="5257800" y="4800600"/>
+            <a:ext cx="6126480" cy="1005840"/>
           </a:xfrm>
           <a:prstGeom prst="rect">
             <a:avLst/>
@@ -2515,7 +2554,7 @@
               <a:buNone/>
             </a:pPr>
             <a:r>
-              <a:rPr lang="en-US" sz="1700" b="1" dirty="0">
+              <a:rPr lang="en-US" sz="1800" b="1" dirty="0">
                 <a:solidFill>
                   <a:srgbClr val="1F8A70"/>
                 </a:solidFill>
@@ -2628,12 +2667,12 @@
         </p:nvSpPr>
         <p:spPr>
           <a:xfrm>
-            <a:off x="7680960" y="365760"/>
-            <a:ext cx="3931920" cy="1051560"/>
+            <a:off x="548640" y="1828800"/>
+            <a:ext cx="4206240" cy="4206240"/>
           </a:xfrm>
           <a:prstGeom prst="roundRect">
             <a:avLst>
-              <a:gd name="adj" fmla="val 6957"/>
+              <a:gd name="adj" fmla="val 1739"/>
             </a:avLst>
           </a:prstGeom>
           <a:solidFill>
@@ -2655,8 +2694,8 @@
         </p:nvSpPr>
         <p:spPr>
           <a:xfrm>
-            <a:off x="7955280" y="502920"/>
-            <a:ext cx="3383280" cy="274320"/>
+            <a:off x="822960" y="2103120"/>
+            <a:ext cx="3657600" cy="365760"/>
           </a:xfrm>
           <a:prstGeom prst="rect">
             <a:avLst/>
@@ -2672,7 +2711,7 @@
               <a:buNone/>
             </a:pPr>
             <a:r>
-              <a:rPr lang="en-US" sz="1300" b="1" dirty="0">
+              <a:rPr lang="en-US" sz="1500" b="1" dirty="0">
                 <a:solidFill>
                   <a:srgbClr val="F2B8B2"/>
                 </a:solidFill>
@@ -2682,7 +2721,7 @@
               </a:rPr>
               <a:t>사용 라이브러리</a:t>
             </a:r>
-            <a:endParaRPr lang="en-US" sz="1300" dirty="0"/>
+            <a:endParaRPr lang="en-US" sz="1500" dirty="0"/>
           </a:p>
         </p:txBody>
       </p:sp>
@@ -2694,8 +2733,8 @@
         </p:nvSpPr>
         <p:spPr>
           <a:xfrm>
-            <a:off x="7955280" y="777240"/>
-            <a:ext cx="3383280" cy="365760"/>
+            <a:off x="822960" y="2514600"/>
+            <a:ext cx="3657600" cy="822960"/>
           </a:xfrm>
           <a:prstGeom prst="rect">
             <a:avLst/>
@@ -2711,7 +2750,7 @@
               <a:buNone/>
             </a:pPr>
             <a:r>
-              <a:rPr lang="en-US" sz="1800" b="1" dirty="0">
+              <a:rPr lang="en-US" sz="2000" b="1" dirty="0">
                 <a:solidFill>
                   <a:srgbClr val="FFFFFF"/>
                 </a:solidFill>
@@ -2721,7 +2760,7 @@
               </a:rPr>
               <a:t>sounddevice · NumPy</a:t>
             </a:r>
-            <a:endParaRPr lang="en-US" sz="1800" dirty="0"/>
+            <a:endParaRPr lang="en-US" sz="2000" dirty="0"/>
           </a:p>
         </p:txBody>
       </p:sp>
@@ -2733,8 +2772,8 @@
         </p:nvSpPr>
         <p:spPr>
           <a:xfrm>
-            <a:off x="7955280" y="1115568"/>
-            <a:ext cx="3383280" cy="228600"/>
+            <a:off x="822960" y="3566160"/>
+            <a:ext cx="3657600" cy="365760"/>
           </a:xfrm>
           <a:prstGeom prst="rect">
             <a:avLst/>
@@ -2750,7 +2789,46 @@
               <a:buNone/>
             </a:pPr>
             <a:r>
-              <a:rPr lang="en-US" sz="1200" dirty="0">
+              <a:rPr lang="en-US" sz="1500" b="1" dirty="0">
+                <a:solidFill>
+                  <a:srgbClr val="9ADBC6"/>
+                </a:solidFill>
+                <a:latin typeface="Malgun Gothic" pitchFamily="34" charset="0"/>
+                <a:ea typeface="Malgun Gothic" pitchFamily="34" charset="-122"/>
+                <a:cs typeface="Malgun Gothic" pitchFamily="34" charset="-120"/>
+              </a:rPr>
+              <a:t>도입 이유</a:t>
+            </a:r>
+            <a:endParaRPr lang="en-US" sz="1500" dirty="0"/>
+          </a:p>
+        </p:txBody>
+      </p:sp>
+      <p:sp>
+        <p:nvSpPr>
+          <p:cNvPr id="8" name="Text 5"/>
+          <p:cNvSpPr txBox="1"/>
+          <p:nvPr/>
+        </p:nvSpPr>
+        <p:spPr>
+          <a:xfrm>
+            <a:off x="822960" y="3977640"/>
+            <a:ext cx="3657600" cy="1828800"/>
+          </a:xfrm>
+          <a:prstGeom prst="rect">
+            <a:avLst/>
+          </a:prstGeom>
+          <a:noFill/>
+          <a:ln/>
+        </p:spPr>
+        <p:txBody>
+          <a:bodyPr wrap="square" lIns="0" tIns="0" rIns="0" bIns="0" rtlCol="0" anchor="t"/>
+          <a:lstStyle/>
+          <a:p>
+            <a:pPr indent="0" marL="0">
+              <a:buNone/>
+            </a:pPr>
+            <a:r>
+              <a:rPr lang="en-US" sz="1500" dirty="0">
                 <a:solidFill>
                   <a:srgbClr val="C9D0DD"/>
                 </a:solidFill>
@@ -2758,26 +2836,26 @@
                 <a:ea typeface="Malgun Gothic" pitchFamily="34" charset="-122"/>
                 <a:cs typeface="Malgun Gothic" pitchFamily="34" charset="-120"/>
               </a:rPr>
-              <a:t>별도 모델 없이 음량 변화로 감지</a:t>
-            </a:r>
-            <a:endParaRPr lang="en-US" sz="1200" dirty="0"/>
-          </a:p>
-        </p:txBody>
-      </p:sp>
-      <p:sp>
-        <p:nvSpPr>
-          <p:cNvPr id="8" name="Shape 5"/>
+              <a:t>별도 모델 없이 음량 변화로 간단히 감지.</a:t>
+            </a:r>
+            <a:endParaRPr lang="en-US" sz="1500" dirty="0"/>
+          </a:p>
+        </p:txBody>
+      </p:sp>
+      <p:sp>
+        <p:nvSpPr>
+          <p:cNvPr id="9" name="Shape 6"/>
           <p:cNvSpPr/>
           <p:nvPr/>
         </p:nvSpPr>
         <p:spPr>
           <a:xfrm>
-            <a:off x="548640" y="1828800"/>
-            <a:ext cx="2608326" cy="2651760"/>
+            <a:off x="5029200" y="1828800"/>
+            <a:ext cx="3200400" cy="1325880"/>
           </a:xfrm>
           <a:prstGeom prst="roundRect">
             <a:avLst>
-              <a:gd name="adj" fmla="val 2805"/>
+              <a:gd name="adj" fmla="val 5517"/>
             </a:avLst>
           </a:prstGeom>
           <a:solidFill>
@@ -2800,14 +2878,14 @@
       </p:sp>
       <p:sp>
         <p:nvSpPr>
-          <p:cNvPr id="9" name="Text 6"/>
+          <p:cNvPr id="10" name="Text 7"/>
           <p:cNvSpPr txBox="1"/>
           <p:nvPr/>
         </p:nvSpPr>
         <p:spPr>
           <a:xfrm>
-            <a:off x="731520" y="2011680"/>
-            <a:ext cx="2242566" cy="2286000"/>
+            <a:off x="5166360" y="1938528"/>
+            <a:ext cx="2971800" cy="1097280"/>
           </a:xfrm>
           <a:prstGeom prst="rect">
             <a:avLst/>
@@ -2826,7 +2904,7 @@
               <a:buNone/>
             </a:pPr>
             <a:r>
-              <a:rPr lang="en-US" sz="2100" b="1" dirty="0">
+              <a:rPr lang="en-US" sz="1600" b="1" dirty="0">
                 <a:solidFill>
                   <a:srgbClr val="6A7384"/>
                 </a:solidFill>
@@ -2846,7 +2924,7 @@
               <a:buNone/>
             </a:pPr>
             <a:r>
-              <a:rPr lang="en-US" sz="1900" dirty="0">
+              <a:rPr lang="en-US" sz="1400" dirty="0">
                 <a:solidFill>
                   <a:srgbClr val="1B2230"/>
                 </a:solidFill>
@@ -2862,18 +2940,18 @@
       </p:sp>
       <p:sp>
         <p:nvSpPr>
-          <p:cNvPr id="10" name="Shape 7"/>
+          <p:cNvPr id="11" name="Shape 8"/>
           <p:cNvSpPr/>
           <p:nvPr/>
         </p:nvSpPr>
         <p:spPr>
           <a:xfrm>
-            <a:off x="3367278" y="1828800"/>
-            <a:ext cx="2608326" cy="2651760"/>
+            <a:off x="8412480" y="1828800"/>
+            <a:ext cx="3200400" cy="1325880"/>
           </a:xfrm>
           <a:prstGeom prst="roundRect">
             <a:avLst>
-              <a:gd name="adj" fmla="val 2805"/>
+              <a:gd name="adj" fmla="val 5517"/>
             </a:avLst>
           </a:prstGeom>
           <a:solidFill>
@@ -2896,14 +2974,14 @@
       </p:sp>
       <p:sp>
         <p:nvSpPr>
-          <p:cNvPr id="11" name="Text 8"/>
+          <p:cNvPr id="12" name="Text 9"/>
           <p:cNvSpPr txBox="1"/>
           <p:nvPr/>
         </p:nvSpPr>
         <p:spPr>
           <a:xfrm>
-            <a:off x="3550158" y="2011680"/>
-            <a:ext cx="2242566" cy="2286000"/>
+            <a:off x="8549640" y="1938528"/>
+            <a:ext cx="2971800" cy="1097280"/>
           </a:xfrm>
           <a:prstGeom prst="rect">
             <a:avLst/>
@@ -2922,7 +3000,7 @@
               <a:buNone/>
             </a:pPr>
             <a:r>
-              <a:rPr lang="en-US" sz="2100" b="1" dirty="0">
+              <a:rPr lang="en-US" sz="1600" b="1" dirty="0">
                 <a:solidFill>
                   <a:srgbClr val="1B2230"/>
                 </a:solidFill>
@@ -2942,7 +3020,7 @@
               <a:buNone/>
             </a:pPr>
             <a:r>
-              <a:rPr lang="en-US" sz="1900" dirty="0">
+              <a:rPr lang="en-US" sz="1400" dirty="0">
                 <a:solidFill>
                   <a:srgbClr val="1B2230"/>
                 </a:solidFill>
@@ -2958,18 +3036,18 @@
       </p:sp>
       <p:sp>
         <p:nvSpPr>
-          <p:cNvPr id="12" name="Shape 9"/>
+          <p:cNvPr id="13" name="Shape 10"/>
           <p:cNvSpPr/>
           <p:nvPr/>
         </p:nvSpPr>
         <p:spPr>
           <a:xfrm>
-            <a:off x="6185916" y="1828800"/>
-            <a:ext cx="2608326" cy="2651760"/>
+            <a:off x="5029200" y="3246120"/>
+            <a:ext cx="3200400" cy="1325880"/>
           </a:xfrm>
           <a:prstGeom prst="roundRect">
             <a:avLst>
-              <a:gd name="adj" fmla="val 2805"/>
+              <a:gd name="adj" fmla="val 5517"/>
             </a:avLst>
           </a:prstGeom>
           <a:solidFill>
@@ -2985,14 +3063,14 @@
       </p:sp>
       <p:sp>
         <p:nvSpPr>
-          <p:cNvPr id="13" name="Text 10"/>
+          <p:cNvPr id="14" name="Text 11"/>
           <p:cNvSpPr txBox="1"/>
           <p:nvPr/>
         </p:nvSpPr>
         <p:spPr>
           <a:xfrm>
-            <a:off x="6368796" y="2011680"/>
-            <a:ext cx="2242566" cy="2286000"/>
+            <a:off x="5166360" y="3355848"/>
+            <a:ext cx="2971800" cy="1097280"/>
           </a:xfrm>
           <a:prstGeom prst="rect">
             <a:avLst/>
@@ -3011,7 +3089,7 @@
               <a:buNone/>
             </a:pPr>
             <a:r>
-              <a:rPr lang="en-US" sz="2100" b="1" dirty="0">
+              <a:rPr lang="en-US" sz="1600" b="1" dirty="0">
                 <a:solidFill>
                   <a:srgbClr val="C8443A"/>
                 </a:solidFill>
@@ -3031,7 +3109,7 @@
               <a:buNone/>
             </a:pPr>
             <a:r>
-              <a:rPr lang="en-US" sz="1900" dirty="0">
+              <a:rPr lang="en-US" sz="1400" dirty="0">
                 <a:solidFill>
                   <a:srgbClr val="1B2230"/>
                 </a:solidFill>
@@ -3047,18 +3125,18 @@
       </p:sp>
       <p:sp>
         <p:nvSpPr>
-          <p:cNvPr id="14" name="Shape 11"/>
+          <p:cNvPr id="15" name="Shape 12"/>
           <p:cNvSpPr/>
           <p:nvPr/>
         </p:nvSpPr>
         <p:spPr>
           <a:xfrm>
-            <a:off x="9004554" y="1828800"/>
-            <a:ext cx="2608326" cy="2651760"/>
+            <a:off x="8412480" y="3246120"/>
+            <a:ext cx="3200400" cy="1325880"/>
           </a:xfrm>
           <a:prstGeom prst="roundRect">
             <a:avLst>
-              <a:gd name="adj" fmla="val 2805"/>
+              <a:gd name="adj" fmla="val 5517"/>
             </a:avLst>
           </a:prstGeom>
           <a:solidFill>
@@ -3074,14 +3152,14 @@
       </p:sp>
       <p:sp>
         <p:nvSpPr>
-          <p:cNvPr id="15" name="Text 12"/>
+          <p:cNvPr id="16" name="Text 13"/>
           <p:cNvSpPr txBox="1"/>
           <p:nvPr/>
         </p:nvSpPr>
         <p:spPr>
           <a:xfrm>
-            <a:off x="9187434" y="2011680"/>
-            <a:ext cx="2242566" cy="2286000"/>
+            <a:off x="8549640" y="3355848"/>
+            <a:ext cx="2971800" cy="1097280"/>
           </a:xfrm>
           <a:prstGeom prst="rect">
             <a:avLst/>
@@ -3100,7 +3178,7 @@
               <a:buNone/>
             </a:pPr>
             <a:r>
-              <a:rPr lang="en-US" sz="2100" b="1" dirty="0">
+              <a:rPr lang="en-US" sz="1600" b="1" dirty="0">
                 <a:solidFill>
                   <a:srgbClr val="1F8A70"/>
                 </a:solidFill>
@@ -3120,7 +3198,7 @@
               <a:buNone/>
             </a:pPr>
             <a:r>
-              <a:rPr lang="en-US" sz="1900" dirty="0">
+              <a:rPr lang="en-US" sz="1400" dirty="0">
                 <a:solidFill>
                   <a:srgbClr val="1B2230"/>
                 </a:solidFill>
@@ -3136,18 +3214,18 @@
       </p:sp>
       <p:sp>
         <p:nvSpPr>
-          <p:cNvPr id="16" name="Shape 13"/>
+          <p:cNvPr id="17" name="Shape 14"/>
           <p:cNvSpPr/>
           <p:nvPr/>
         </p:nvSpPr>
         <p:spPr>
           <a:xfrm>
-            <a:off x="548640" y="4754880"/>
-            <a:ext cx="11064240" cy="1188720"/>
+            <a:off x="5029200" y="4754880"/>
+            <a:ext cx="6583680" cy="1280160"/>
           </a:xfrm>
           <a:prstGeom prst="roundRect">
             <a:avLst>
-              <a:gd name="adj" fmla="val 6154"/>
+              <a:gd name="adj" fmla="val 5714"/>
             </a:avLst>
           </a:prstGeom>
           <a:solidFill>
@@ -3163,14 +3241,14 @@
       </p:sp>
       <p:sp>
         <p:nvSpPr>
-          <p:cNvPr id="17" name="Text 14"/>
+          <p:cNvPr id="18" name="Text 15"/>
           <p:cNvSpPr txBox="1"/>
           <p:nvPr/>
         </p:nvSpPr>
         <p:spPr>
           <a:xfrm>
-            <a:off x="822960" y="4937760"/>
-            <a:ext cx="10515600" cy="822960"/>
+            <a:off x="5257800" y="4754880"/>
+            <a:ext cx="6126480" cy="1280160"/>
           </a:xfrm>
           <a:prstGeom prst="rect">
             <a:avLst/>
@@ -3179,14 +3257,14 @@
           <a:ln/>
         </p:spPr>
         <p:txBody>
-          <a:bodyPr wrap="square" lIns="0" tIns="0" rIns="0" bIns="0" rtlCol="0" anchor="t"/>
-          <a:lstStyle/>
-          <a:p>
-            <a:pPr indent="0" marL="0">
-              <a:buNone/>
-            </a:pPr>
-            <a:r>
-              <a:rPr lang="en-US" sz="1800" b="1" dirty="0">
+          <a:bodyPr wrap="square" lIns="0" tIns="0" rIns="0" bIns="0" rtlCol="0" anchor="ctr"/>
+          <a:lstStyle/>
+          <a:p>
+            <a:pPr indent="0" marL="0">
+              <a:buNone/>
+            </a:pPr>
+            <a:r>
+              <a:rPr lang="en-US" sz="1600" b="1" dirty="0">
                 <a:solidFill>
                   <a:srgbClr val="B7791F"/>
                 </a:solidFill>
@@ -3200,7 +3278,7 @@
               <a:buNone/>
             </a:pPr>
             <a:r>
-              <a:rPr lang="en-US" sz="1800" dirty="0">
+              <a:rPr lang="en-US" sz="1600" dirty="0">
                 <a:solidFill>
                   <a:srgbClr val="1B2230"/>
                 </a:solidFill>
@@ -3210,7 +3288,7 @@
               </a:rPr>
               <a:t>양손 모으기 1초로 모드를 전환. 키보드 소리와 박수는 음량(peak)으로 구분.</a:t>
             </a:r>
-            <a:endParaRPr lang="en-US" sz="1800" dirty="0"/>
+            <a:endParaRPr lang="en-US" sz="1600" dirty="0"/>
           </a:p>
         </p:txBody>
       </p:sp>
@@ -11524,7 +11602,7 @@
         <p:spPr>
           <a:xfrm>
             <a:off x="548640" y="1828800"/>
-            <a:ext cx="4297680" cy="4206240"/>
+            <a:ext cx="4206240" cy="4206240"/>
           </a:xfrm>
           <a:prstGeom prst="roundRect">
             <a:avLst>
@@ -11551,7 +11629,7 @@
         <p:spPr>
           <a:xfrm>
             <a:off x="822960" y="2103120"/>
-            <a:ext cx="3749040" cy="365760"/>
+            <a:ext cx="3657600" cy="365760"/>
           </a:xfrm>
           <a:prstGeom prst="rect">
             <a:avLst/>
@@ -11567,15 +11645,15 @@
               <a:buNone/>
             </a:pPr>
             <a:r>
-              <a:rPr lang="en-US" sz="1500" dirty="0">
-                <a:solidFill>
-                  <a:srgbClr val="C9D0DD"/>
-                </a:solidFill>
-                <a:latin typeface="Malgun Gothic" pitchFamily="34" charset="0"/>
-                <a:ea typeface="Malgun Gothic" pitchFamily="34" charset="-122"/>
-                <a:cs typeface="Malgun Gothic" pitchFamily="34" charset="-120"/>
-              </a:rPr>
-              <a:t>엄지–중지 거리</a:t>
+              <a:rPr lang="en-US" sz="1500" b="1" dirty="0">
+                <a:solidFill>
+                  <a:srgbClr val="F2B8B2"/>
+                </a:solidFill>
+                <a:latin typeface="Malgun Gothic" pitchFamily="34" charset="0"/>
+                <a:ea typeface="Malgun Gothic" pitchFamily="34" charset="-122"/>
+                <a:cs typeface="Malgun Gothic" pitchFamily="34" charset="-120"/>
+              </a:rPr>
+              <a:t>사용 라이브러리</a:t>
             </a:r>
             <a:endParaRPr lang="en-US" sz="1500" dirty="0"/>
           </a:p>
@@ -11589,8 +11667,8 @@
         </p:nvSpPr>
         <p:spPr>
           <a:xfrm>
-            <a:off x="822960" y="2697480"/>
-            <a:ext cx="3749040" cy="914400"/>
+            <a:off x="822960" y="2514600"/>
+            <a:ext cx="3657600" cy="822960"/>
           </a:xfrm>
           <a:prstGeom prst="rect">
             <a:avLst/>
@@ -11606,7 +11684,7 @@
               <a:buNone/>
             </a:pPr>
             <a:r>
-              <a:rPr lang="en-US" sz="4400" b="1" dirty="0">
+              <a:rPr lang="en-US" sz="2000" b="1" dirty="0">
                 <a:solidFill>
                   <a:srgbClr val="FFFFFF"/>
                 </a:solidFill>
@@ -11614,9 +11692,9 @@
                 <a:ea typeface="Malgun Gothic" pitchFamily="34" charset="-122"/>
                 <a:cs typeface="Malgun Gothic" pitchFamily="34" charset="-120"/>
               </a:rPr>
-              <a:t>0.17 → 0.003</a:t>
-            </a:r>
-            <a:endParaRPr lang="en-US" sz="4400" dirty="0"/>
+              <a:t>MediaPipe Hands · OpenCV</a:t>
+            </a:r>
+            <a:endParaRPr lang="en-US" sz="2000" dirty="0"/>
           </a:p>
         </p:txBody>
       </p:sp>
@@ -11628,8 +11706,8 @@
         </p:nvSpPr>
         <p:spPr>
           <a:xfrm>
-            <a:off x="822960" y="3794760"/>
-            <a:ext cx="3749040" cy="731520"/>
+            <a:off x="822960" y="3566160"/>
+            <a:ext cx="3657600" cy="365760"/>
           </a:xfrm>
           <a:prstGeom prst="rect">
             <a:avLst/>
@@ -11645,7 +11723,46 @@
               <a:buNone/>
             </a:pPr>
             <a:r>
-              <a:rPr lang="en-US" sz="1400" dirty="0">
+              <a:rPr lang="en-US" sz="1500" b="1" dirty="0">
+                <a:solidFill>
+                  <a:srgbClr val="9ADBC6"/>
+                </a:solidFill>
+                <a:latin typeface="Malgun Gothic" pitchFamily="34" charset="0"/>
+                <a:ea typeface="Malgun Gothic" pitchFamily="34" charset="-122"/>
+                <a:cs typeface="Malgun Gothic" pitchFamily="34" charset="-120"/>
+              </a:rPr>
+              <a:t>도입 이유</a:t>
+            </a:r>
+            <a:endParaRPr lang="en-US" sz="1500" dirty="0"/>
+          </a:p>
+        </p:txBody>
+      </p:sp>
+      <p:sp>
+        <p:nvSpPr>
+          <p:cNvPr id="8" name="Text 5"/>
+          <p:cNvSpPr txBox="1"/>
+          <p:nvPr/>
+        </p:nvSpPr>
+        <p:spPr>
+          <a:xfrm>
+            <a:off x="822960" y="3977640"/>
+            <a:ext cx="3657600" cy="1828800"/>
+          </a:xfrm>
+          <a:prstGeom prst="rect">
+            <a:avLst/>
+          </a:prstGeom>
+          <a:noFill/>
+          <a:ln/>
+        </p:spPr>
+        <p:txBody>
+          <a:bodyPr wrap="square" lIns="0" tIns="0" rIns="0" bIns="0" rtlCol="0" anchor="t"/>
+          <a:lstStyle/>
+          <a:p>
+            <a:pPr indent="0" marL="0">
+              <a:buNone/>
+            </a:pPr>
+            <a:r>
+              <a:rPr lang="en-US" sz="1500" dirty="0">
                 <a:solidFill>
                   <a:srgbClr val="C9D0DD"/>
                 </a:solidFill>
@@ -11653,26 +11770,43 @@
                 <a:ea typeface="Malgun Gothic" pitchFamily="34" charset="-122"/>
                 <a:cs typeface="Malgun Gothic" pitchFamily="34" charset="-120"/>
               </a:rPr>
-              <a:t>손을 돌리는 동안 기록된 값</a:t>
-            </a:r>
-            <a:endParaRPr lang="en-US" sz="1400" dirty="0"/>
-          </a:p>
-        </p:txBody>
-      </p:sp>
-      <p:sp>
-        <p:nvSpPr>
-          <p:cNvPr id="8" name="Shape 5"/>
+              <a:t>수어 인식 프로젝트에서 써 본</a:t>
+            </a:r>
+            <a:endParaRPr lang="en-US" sz="1500" dirty="0"/>
+          </a:p>
+          <a:p>
+            <a:pPr indent="0" marL="0">
+              <a:buNone/>
+            </a:pPr>
+            <a:r>
+              <a:rPr lang="en-US" sz="1500" dirty="0">
+                <a:solidFill>
+                  <a:srgbClr val="C9D0DD"/>
+                </a:solidFill>
+                <a:latin typeface="Malgun Gothic" pitchFamily="34" charset="0"/>
+                <a:ea typeface="Malgun Gothic" pitchFamily="34" charset="-122"/>
+                <a:cs typeface="Malgun Gothic" pitchFamily="34" charset="-120"/>
+              </a:rPr>
+              <a:t>MediaPipe를 이어서 사용.</a:t>
+            </a:r>
+            <a:endParaRPr lang="en-US" sz="1500" dirty="0"/>
+          </a:p>
+        </p:txBody>
+      </p:sp>
+      <p:sp>
+        <p:nvSpPr>
+          <p:cNvPr id="9" name="Shape 6"/>
           <p:cNvSpPr/>
           <p:nvPr/>
         </p:nvSpPr>
         <p:spPr>
           <a:xfrm>
-            <a:off x="5120640" y="1828800"/>
-            <a:ext cx="6492240" cy="1325880"/>
+            <a:off x="5029200" y="1828800"/>
+            <a:ext cx="6583680" cy="1280160"/>
           </a:xfrm>
           <a:prstGeom prst="roundRect">
             <a:avLst>
-              <a:gd name="adj" fmla="val 5517"/>
+              <a:gd name="adj" fmla="val 5714"/>
             </a:avLst>
           </a:prstGeom>
           <a:solidFill>
@@ -11688,14 +11822,14 @@
       </p:sp>
       <p:sp>
         <p:nvSpPr>
-          <p:cNvPr id="9" name="Text 6"/>
+          <p:cNvPr id="10" name="Text 7"/>
           <p:cNvSpPr txBox="1"/>
           <p:nvPr/>
         </p:nvSpPr>
         <p:spPr>
           <a:xfrm>
-            <a:off x="5349240" y="1965960"/>
-            <a:ext cx="6035040" cy="1051560"/>
+            <a:off x="5257800" y="1965960"/>
+            <a:ext cx="6126480" cy="1005840"/>
           </a:xfrm>
           <a:prstGeom prst="rect">
             <a:avLst/>
@@ -11714,7 +11848,7 @@
               <a:buNone/>
             </a:pPr>
             <a:r>
-              <a:rPr lang="en-US" sz="1700" b="1" dirty="0">
+              <a:rPr lang="en-US" sz="1800" b="1" dirty="0">
                 <a:solidFill>
                   <a:srgbClr val="C8443A"/>
                 </a:solidFill>
@@ -11734,7 +11868,7 @@
               <a:buNone/>
             </a:pPr>
             <a:r>
-              <a:rPr lang="en-US" sz="1600" dirty="0">
+              <a:rPr lang="en-US" sz="1500" dirty="0">
                 <a:solidFill>
                   <a:srgbClr val="1B2230"/>
                 </a:solidFill>
@@ -11750,18 +11884,18 @@
       </p:sp>
       <p:sp>
         <p:nvSpPr>
-          <p:cNvPr id="10" name="Shape 7"/>
+          <p:cNvPr id="11" name="Shape 8"/>
           <p:cNvSpPr/>
           <p:nvPr/>
         </p:nvSpPr>
         <p:spPr>
           <a:xfrm>
-            <a:off x="5120640" y="3264408"/>
-            <a:ext cx="6492240" cy="1325880"/>
+            <a:off x="5029200" y="3246120"/>
+            <a:ext cx="6583680" cy="1280160"/>
           </a:xfrm>
           <a:prstGeom prst="roundRect">
             <a:avLst>
-              <a:gd name="adj" fmla="val 5517"/>
+              <a:gd name="adj" fmla="val 5714"/>
             </a:avLst>
           </a:prstGeom>
           <a:solidFill>
@@ -11777,14 +11911,14 @@
       </p:sp>
       <p:sp>
         <p:nvSpPr>
-          <p:cNvPr id="11" name="Text 8"/>
+          <p:cNvPr id="12" name="Text 9"/>
           <p:cNvSpPr txBox="1"/>
           <p:nvPr/>
         </p:nvSpPr>
         <p:spPr>
           <a:xfrm>
-            <a:off x="5349240" y="3401568"/>
-            <a:ext cx="6035040" cy="1051560"/>
+            <a:off x="5257800" y="3383280"/>
+            <a:ext cx="6126480" cy="1005840"/>
           </a:xfrm>
           <a:prstGeom prst="rect">
             <a:avLst/>
@@ -11803,7 +11937,7 @@
               <a:buNone/>
             </a:pPr>
             <a:r>
-              <a:rPr lang="en-US" sz="1700" b="1" dirty="0">
+              <a:rPr lang="en-US" sz="1800" b="1" dirty="0">
                 <a:solidFill>
                   <a:srgbClr val="1F8A70"/>
                 </a:solidFill>
@@ -11823,7 +11957,7 @@
               <a:buNone/>
             </a:pPr>
             <a:r>
-              <a:rPr lang="en-US" sz="1600" dirty="0">
+              <a:rPr lang="en-US" sz="1500" dirty="0">
                 <a:solidFill>
                   <a:srgbClr val="1B2230"/>
                 </a:solidFill>
@@ -11831,7 +11965,7 @@
                 <a:ea typeface="Malgun Gothic" pitchFamily="34" charset="-122"/>
                 <a:cs typeface="Malgun Gothic" pitchFamily="34" charset="-120"/>
               </a:rPr>
-              <a:t>손바닥이 정면일 때만 클릭 판정. 이중 임계값과 0.1초 유지시간 추가.</a:t>
+              <a:t>손바닥이 정면일 때만 클릭 판정. 0.1초 이상 유지해야 인정.</a:t>
             </a:r>
             <a:endParaRPr lang="en-US" sz="1400" dirty="0"/>
           </a:p>
@@ -11839,18 +11973,18 @@
       </p:sp>
       <p:sp>
         <p:nvSpPr>
-          <p:cNvPr id="12" name="Shape 9"/>
+          <p:cNvPr id="13" name="Shape 10"/>
           <p:cNvSpPr/>
           <p:nvPr/>
         </p:nvSpPr>
         <p:spPr>
           <a:xfrm>
-            <a:off x="5120640" y="4700016"/>
-            <a:ext cx="6492240" cy="1325880"/>
+            <a:off x="5029200" y="4663440"/>
+            <a:ext cx="6583680" cy="1280160"/>
           </a:xfrm>
           <a:prstGeom prst="roundRect">
             <a:avLst>
-              <a:gd name="adj" fmla="val 5517"/>
+              <a:gd name="adj" fmla="val 5714"/>
             </a:avLst>
           </a:prstGeom>
           <a:solidFill>
@@ -11866,14 +12000,14 @@
       </p:sp>
       <p:sp>
         <p:nvSpPr>
-          <p:cNvPr id="13" name="Text 10"/>
+          <p:cNvPr id="14" name="Text 11"/>
           <p:cNvSpPr txBox="1"/>
           <p:nvPr/>
         </p:nvSpPr>
         <p:spPr>
           <a:xfrm>
-            <a:off x="5349240" y="4837176"/>
-            <a:ext cx="6035040" cy="1051560"/>
+            <a:off x="5257800" y="4800600"/>
+            <a:ext cx="6126480" cy="1005840"/>
           </a:xfrm>
           <a:prstGeom prst="rect">
             <a:avLst/>
@@ -11892,7 +12026,7 @@
               <a:buNone/>
             </a:pPr>
             <a:r>
-              <a:rPr lang="en-US" sz="1700" b="1" dirty="0">
+              <a:rPr lang="en-US" sz="1800" b="1" dirty="0">
                 <a:solidFill>
                   <a:srgbClr val="1F8A70"/>
                 </a:solidFill>
@@ -11912,7 +12046,7 @@
               <a:buNone/>
             </a:pPr>
             <a:r>
-              <a:rPr lang="en-US" sz="1600" dirty="0">
+              <a:rPr lang="en-US" sz="1500" dirty="0">
                 <a:solidFill>
                   <a:srgbClr val="1B2230"/>
                 </a:solidFill>
@@ -11920,7 +12054,7 @@
                 <a:ea typeface="Malgun Gothic" pitchFamily="34" charset="-122"/>
                 <a:cs typeface="Malgun Gothic" pitchFamily="34" charset="-120"/>
               </a:rPr>
-              <a:t>거리 영향은 정규화로 제거. 손날 판정은 0.28 미만에서 진입, 0.42 초과에서 해제(사이는 직전 상태 유지).</a:t>
+              <a:t>거리 영향은 정규화로 제거. 손날 판정은 들어가는 기준과 나오는 기준을 다르게 둬서 깜빡임을 막음.</a:t>
             </a:r>
             <a:endParaRPr lang="en-US" sz="1400" dirty="0"/>
           </a:p>
@@ -12874,12 +13008,12 @@
         </p:nvSpPr>
         <p:spPr>
           <a:xfrm>
-            <a:off x="7680960" y="365760"/>
-            <a:ext cx="3931920" cy="868680"/>
+            <a:off x="548640" y="1828800"/>
+            <a:ext cx="4206240" cy="4206240"/>
           </a:xfrm>
           <a:prstGeom prst="roundRect">
             <a:avLst>
-              <a:gd name="adj" fmla="val 8421"/>
+              <a:gd name="adj" fmla="val 1739"/>
             </a:avLst>
           </a:prstGeom>
           <a:solidFill>
@@ -12901,8 +13035,8 @@
         </p:nvSpPr>
         <p:spPr>
           <a:xfrm>
-            <a:off x="7955280" y="502920"/>
-            <a:ext cx="3383280" cy="274320"/>
+            <a:off x="822960" y="2103120"/>
+            <a:ext cx="3657600" cy="365760"/>
           </a:xfrm>
           <a:prstGeom prst="rect">
             <a:avLst/>
@@ -12918,7 +13052,7 @@
               <a:buNone/>
             </a:pPr>
             <a:r>
-              <a:rPr lang="en-US" sz="1300" b="1" dirty="0">
+              <a:rPr lang="en-US" sz="1500" b="1" dirty="0">
                 <a:solidFill>
                   <a:srgbClr val="F2B8B2"/>
                 </a:solidFill>
@@ -12928,7 +13062,7 @@
               </a:rPr>
               <a:t>사용 모델</a:t>
             </a:r>
-            <a:endParaRPr lang="en-US" sz="1300" dirty="0"/>
+            <a:endParaRPr lang="en-US" sz="1500" dirty="0"/>
           </a:p>
         </p:txBody>
       </p:sp>
@@ -12940,8 +13074,8 @@
         </p:nvSpPr>
         <p:spPr>
           <a:xfrm>
-            <a:off x="7955280" y="777240"/>
-            <a:ext cx="3383280" cy="365760"/>
+            <a:off x="822960" y="2514600"/>
+            <a:ext cx="3657600" cy="822960"/>
           </a:xfrm>
           <a:prstGeom prst="rect">
             <a:avLst/>
@@ -12957,7 +13091,7 @@
               <a:buNone/>
             </a:pPr>
             <a:r>
-              <a:rPr lang="en-US" sz="1800" b="1" dirty="0">
+              <a:rPr lang="en-US" sz="2000" b="1" dirty="0">
                 <a:solidFill>
                   <a:srgbClr val="FFFFFF"/>
                 </a:solidFill>
@@ -12967,24 +13101,102 @@
               </a:rPr>
               <a:t>faster-whisper medium</a:t>
             </a:r>
-            <a:endParaRPr lang="en-US" sz="1800" dirty="0"/>
-          </a:p>
-        </p:txBody>
-      </p:sp>
-      <p:sp>
-        <p:nvSpPr>
-          <p:cNvPr id="7" name="Shape 4"/>
+            <a:endParaRPr lang="en-US" sz="2000" dirty="0"/>
+          </a:p>
+        </p:txBody>
+      </p:sp>
+      <p:sp>
+        <p:nvSpPr>
+          <p:cNvPr id="7" name="Text 4"/>
+          <p:cNvSpPr txBox="1"/>
+          <p:nvPr/>
+        </p:nvSpPr>
+        <p:spPr>
+          <a:xfrm>
+            <a:off x="822960" y="3566160"/>
+            <a:ext cx="3657600" cy="365760"/>
+          </a:xfrm>
+          <a:prstGeom prst="rect">
+            <a:avLst/>
+          </a:prstGeom>
+          <a:noFill/>
+          <a:ln/>
+        </p:spPr>
+        <p:txBody>
+          <a:bodyPr wrap="square" lIns="0" tIns="0" rIns="0" bIns="0" rtlCol="0" anchor="t"/>
+          <a:lstStyle/>
+          <a:p>
+            <a:pPr indent="0" marL="0">
+              <a:buNone/>
+            </a:pPr>
+            <a:r>
+              <a:rPr lang="en-US" sz="1500" b="1" dirty="0">
+                <a:solidFill>
+                  <a:srgbClr val="9ADBC6"/>
+                </a:solidFill>
+                <a:latin typeface="Malgun Gothic" pitchFamily="34" charset="0"/>
+                <a:ea typeface="Malgun Gothic" pitchFamily="34" charset="-122"/>
+                <a:cs typeface="Malgun Gothic" pitchFamily="34" charset="-120"/>
+              </a:rPr>
+              <a:t>도입 이유</a:t>
+            </a:r>
+            <a:endParaRPr lang="en-US" sz="1500" dirty="0"/>
+          </a:p>
+        </p:txBody>
+      </p:sp>
+      <p:sp>
+        <p:nvSpPr>
+          <p:cNvPr id="8" name="Text 5"/>
+          <p:cNvSpPr txBox="1"/>
+          <p:nvPr/>
+        </p:nvSpPr>
+        <p:spPr>
+          <a:xfrm>
+            <a:off x="822960" y="3977640"/>
+            <a:ext cx="3657600" cy="1828800"/>
+          </a:xfrm>
+          <a:prstGeom prst="rect">
+            <a:avLst/>
+          </a:prstGeom>
+          <a:noFill/>
+          <a:ln/>
+        </p:spPr>
+        <p:txBody>
+          <a:bodyPr wrap="square" lIns="0" tIns="0" rIns="0" bIns="0" rtlCol="0" anchor="t"/>
+          <a:lstStyle/>
+          <a:p>
+            <a:pPr indent="0" marL="0">
+              <a:buNone/>
+            </a:pPr>
+            <a:r>
+              <a:rPr lang="en-US" sz="1500" dirty="0">
+                <a:solidFill>
+                  <a:srgbClr val="C9D0DD"/>
+                </a:solidFill>
+                <a:latin typeface="Malgun Gothic" pitchFamily="34" charset="0"/>
+                <a:ea typeface="Malgun Gothic" pitchFamily="34" charset="-122"/>
+                <a:cs typeface="Malgun Gothic" pitchFamily="34" charset="-120"/>
+              </a:rPr>
+              <a:t>음성 인식이 궁금해서. 소음을 고려해 small보다 큰 모델을 선택.</a:t>
+            </a:r>
+            <a:endParaRPr lang="en-US" sz="1500" dirty="0"/>
+          </a:p>
+        </p:txBody>
+      </p:sp>
+      <p:sp>
+        <p:nvSpPr>
+          <p:cNvPr id="9" name="Shape 6"/>
           <p:cNvSpPr/>
           <p:nvPr/>
         </p:nvSpPr>
         <p:spPr>
           <a:xfrm>
-            <a:off x="548640" y="1828800"/>
-            <a:ext cx="2608326" cy="2651760"/>
+            <a:off x="5029200" y="1828800"/>
+            <a:ext cx="6583680" cy="914400"/>
           </a:xfrm>
           <a:prstGeom prst="roundRect">
             <a:avLst>
-              <a:gd name="adj" fmla="val 2805"/>
+              <a:gd name="adj" fmla="val 8000"/>
             </a:avLst>
           </a:prstGeom>
           <a:solidFill>
@@ -13007,14 +13219,14 @@
       </p:sp>
       <p:sp>
         <p:nvSpPr>
-          <p:cNvPr id="8" name="Text 5"/>
+          <p:cNvPr id="10" name="Text 7"/>
           <p:cNvSpPr txBox="1"/>
           <p:nvPr/>
         </p:nvSpPr>
         <p:spPr>
           <a:xfrm>
-            <a:off x="731520" y="2011680"/>
-            <a:ext cx="2242566" cy="2286000"/>
+            <a:off x="5257800" y="1920240"/>
+            <a:ext cx="6126480" cy="731520"/>
           </a:xfrm>
           <a:prstGeom prst="rect">
             <a:avLst/>
@@ -13033,7 +13245,7 @@
               <a:buNone/>
             </a:pPr>
             <a:r>
-              <a:rPr lang="en-US" sz="2100" b="1" dirty="0">
+              <a:rPr lang="en-US" sz="1700" b="1" dirty="0">
                 <a:solidFill>
                   <a:srgbClr val="1B2230"/>
                 </a:solidFill>
@@ -13041,7 +13253,7 @@
                 <a:ea typeface="Malgun Gothic" pitchFamily="34" charset="-122"/>
                 <a:cs typeface="Malgun Gothic" pitchFamily="34" charset="-120"/>
               </a:rPr>
-              <a:t>모델</a:t>
+              <a:t>① 손등 3초</a:t>
             </a:r>
             <a:endParaRPr lang="en-US" sz="1400" dirty="0"/>
           </a:p>
@@ -13053,7 +13265,7 @@
               <a:buNone/>
             </a:pPr>
             <a:r>
-              <a:rPr lang="en-US" sz="1900" dirty="0">
+              <a:rPr lang="en-US" sz="1600" dirty="0">
                 <a:solidFill>
                   <a:srgbClr val="1B2230"/>
                 </a:solidFill>
@@ -13061,7 +13273,7 @@
                 <a:ea typeface="Malgun Gothic" pitchFamily="34" charset="-122"/>
                 <a:cs typeface="Malgun Gothic" pitchFamily="34" charset="-120"/>
               </a:rPr>
-              <a:t>소음을 고려해 small보다 큰 모델 선택</a:t>
+              <a:t>손을 떼면 녹음 종료. 소음 환경의 주력</a:t>
             </a:r>
             <a:endParaRPr lang="en-US" sz="1400" dirty="0"/>
           </a:p>
@@ -13069,18 +13281,18 @@
       </p:sp>
       <p:sp>
         <p:nvSpPr>
-          <p:cNvPr id="9" name="Shape 6"/>
+          <p:cNvPr id="11" name="Shape 8"/>
           <p:cNvSpPr/>
           <p:nvPr/>
         </p:nvSpPr>
         <p:spPr>
           <a:xfrm>
-            <a:off x="3367278" y="1828800"/>
-            <a:ext cx="2608326" cy="2651760"/>
+            <a:off x="5029200" y="2834640"/>
+            <a:ext cx="6583680" cy="914400"/>
           </a:xfrm>
           <a:prstGeom prst="roundRect">
             <a:avLst>
-              <a:gd name="adj" fmla="val 2805"/>
+              <a:gd name="adj" fmla="val 8000"/>
             </a:avLst>
           </a:prstGeom>
           <a:solidFill>
@@ -13103,14 +13315,14 @@
       </p:sp>
       <p:sp>
         <p:nvSpPr>
-          <p:cNvPr id="10" name="Text 7"/>
+          <p:cNvPr id="12" name="Text 9"/>
           <p:cNvSpPr txBox="1"/>
           <p:nvPr/>
         </p:nvSpPr>
         <p:spPr>
           <a:xfrm>
-            <a:off x="3550158" y="2011680"/>
-            <a:ext cx="2242566" cy="2286000"/>
+            <a:off x="5257800" y="2926080"/>
+            <a:ext cx="6126480" cy="731520"/>
           </a:xfrm>
           <a:prstGeom prst="rect">
             <a:avLst/>
@@ -13129,7 +13341,7 @@
               <a:buNone/>
             </a:pPr>
             <a:r>
-              <a:rPr lang="en-US" sz="2100" b="1" dirty="0">
+              <a:rPr lang="en-US" sz="1700" b="1" dirty="0">
                 <a:solidFill>
                   <a:srgbClr val="1B2230"/>
                 </a:solidFill>
@@ -13137,7 +13349,7 @@
                 <a:ea typeface="Malgun Gothic" pitchFamily="34" charset="-122"/>
                 <a:cs typeface="Malgun Gothic" pitchFamily="34" charset="-120"/>
               </a:rPr>
-              <a:t>① 손등 3초</a:t>
+              <a:t>② 웨이크워드</a:t>
             </a:r>
             <a:endParaRPr lang="en-US" sz="1400" dirty="0"/>
           </a:p>
@@ -13149,7 +13361,7 @@
               <a:buNone/>
             </a:pPr>
             <a:r>
-              <a:rPr lang="en-US" sz="1900" dirty="0">
+              <a:rPr lang="en-US" sz="1600" dirty="0">
                 <a:solidFill>
                   <a:srgbClr val="1B2230"/>
                 </a:solidFill>
@@ -13157,7 +13369,7 @@
                 <a:ea typeface="Malgun Gothic" pitchFamily="34" charset="-122"/>
                 <a:cs typeface="Malgun Gothic" pitchFamily="34" charset="-120"/>
               </a:rPr>
-              <a:t>손을 떼면 녹음 종료. 소음 환경의 주력</a:t>
+              <a:t>무음 1.2초 뒤 자동 종료. "웨이크"는 임시값</a:t>
             </a:r>
             <a:endParaRPr lang="en-US" sz="1400" dirty="0"/>
           </a:p>
@@ -13165,114 +13377,18 @@
       </p:sp>
       <p:sp>
         <p:nvSpPr>
-          <p:cNvPr id="11" name="Shape 8"/>
+          <p:cNvPr id="13" name="Shape 10"/>
           <p:cNvSpPr/>
           <p:nvPr/>
         </p:nvSpPr>
         <p:spPr>
           <a:xfrm>
-            <a:off x="6185916" y="1828800"/>
-            <a:ext cx="2608326" cy="2651760"/>
+            <a:off x="5029200" y="3840480"/>
+            <a:ext cx="6583680" cy="914400"/>
           </a:xfrm>
           <a:prstGeom prst="roundRect">
             <a:avLst>
-              <a:gd name="adj" fmla="val 2805"/>
-            </a:avLst>
-          </a:prstGeom>
-          <a:solidFill>
-            <a:srgbClr val="FFFFFF"/>
-          </a:solidFill>
-          <a:ln w="12700">
-            <a:solidFill>
-              <a:srgbClr val="FFFFFF"/>
-            </a:solidFill>
-            <a:prstDash val="solid"/>
-          </a:ln>
-          <a:effectLst>
-            <a:outerShdw sx="100000" sy="100000" kx="0" ky="0" algn="bl" rotWithShape="0" blurRad="76200" dist="25400" dir="5400000">
-              <a:srgbClr val="000000">
-                <a:alpha val="12000"/>
-              </a:srgbClr>
-            </a:outerShdw>
-          </a:effectLst>
-        </p:spPr>
-      </p:sp>
-      <p:sp>
-        <p:nvSpPr>
-          <p:cNvPr id="12" name="Text 9"/>
-          <p:cNvSpPr txBox="1"/>
-          <p:nvPr/>
-        </p:nvSpPr>
-        <p:spPr>
-          <a:xfrm>
-            <a:off x="6368796" y="2011680"/>
-            <a:ext cx="2242566" cy="2286000"/>
-          </a:xfrm>
-          <a:prstGeom prst="rect">
-            <a:avLst/>
-          </a:prstGeom>
-          <a:noFill/>
-          <a:ln/>
-        </p:spPr>
-        <p:txBody>
-          <a:bodyPr wrap="square" lIns="0" tIns="0" rIns="0" bIns="0" rtlCol="0" anchor="t"/>
-          <a:lstStyle/>
-          <a:p>
-            <a:pPr indent="0" marL="0">
-              <a:spcAft>
-                <a:spcPts val="400"/>
-              </a:spcAft>
-              <a:buNone/>
-            </a:pPr>
-            <a:r>
-              <a:rPr lang="en-US" sz="2100" b="1" dirty="0">
-                <a:solidFill>
-                  <a:srgbClr val="1B2230"/>
-                </a:solidFill>
-                <a:latin typeface="Malgun Gothic" pitchFamily="34" charset="0"/>
-                <a:ea typeface="Malgun Gothic" pitchFamily="34" charset="-122"/>
-                <a:cs typeface="Malgun Gothic" pitchFamily="34" charset="-120"/>
-              </a:rPr>
-              <a:t>② 웨이크워드</a:t>
-            </a:r>
-            <a:endParaRPr lang="en-US" sz="1400" dirty="0"/>
-          </a:p>
-          <a:p>
-            <a:pPr indent="0" marL="0">
-              <a:spcAft>
-                <a:spcPts val="400"/>
-              </a:spcAft>
-              <a:buNone/>
-            </a:pPr>
-            <a:r>
-              <a:rPr lang="en-US" sz="1900" dirty="0">
-                <a:solidFill>
-                  <a:srgbClr val="1B2230"/>
-                </a:solidFill>
-                <a:latin typeface="Malgun Gothic" pitchFamily="34" charset="0"/>
-                <a:ea typeface="Malgun Gothic" pitchFamily="34" charset="-122"/>
-                <a:cs typeface="Malgun Gothic" pitchFamily="34" charset="-120"/>
-              </a:rPr>
-              <a:t>무음 1.2초 뒤 자동 종료. "웨이크"는 임시값</a:t>
-            </a:r>
-            <a:endParaRPr lang="en-US" sz="1400" dirty="0"/>
-          </a:p>
-        </p:txBody>
-      </p:sp>
-      <p:sp>
-        <p:nvSpPr>
-          <p:cNvPr id="13" name="Shape 10"/>
-          <p:cNvSpPr/>
-          <p:nvPr/>
-        </p:nvSpPr>
-        <p:spPr>
-          <a:xfrm>
-            <a:off x="9004554" y="1828800"/>
-            <a:ext cx="2608326" cy="2651760"/>
-          </a:xfrm>
-          <a:prstGeom prst="roundRect">
-            <a:avLst>
-              <a:gd name="adj" fmla="val 2805"/>
+              <a:gd name="adj" fmla="val 8000"/>
             </a:avLst>
           </a:prstGeom>
           <a:solidFill>
@@ -13294,8 +13410,8 @@
         </p:nvSpPr>
         <p:spPr>
           <a:xfrm>
-            <a:off x="9187434" y="2011680"/>
-            <a:ext cx="2242566" cy="2286000"/>
+            <a:off x="5257800" y="3931920"/>
+            <a:ext cx="6126480" cy="731520"/>
           </a:xfrm>
           <a:prstGeom prst="rect">
             <a:avLst/>
@@ -13314,7 +13430,7 @@
               <a:buNone/>
             </a:pPr>
             <a:r>
-              <a:rPr lang="en-US" sz="2100" b="1" dirty="0">
+              <a:rPr lang="en-US" sz="1700" b="1" dirty="0">
                 <a:solidFill>
                   <a:srgbClr val="1F8A70"/>
                 </a:solidFill>
@@ -13334,7 +13450,7 @@
               <a:buNone/>
             </a:pPr>
             <a:r>
-              <a:rPr lang="en-US" sz="1900" dirty="0">
+              <a:rPr lang="en-US" sz="1600" dirty="0">
                 <a:solidFill>
                   <a:srgbClr val="1B2230"/>
                 </a:solidFill>
@@ -13356,12 +13472,12 @@
         </p:nvSpPr>
         <p:spPr>
           <a:xfrm>
-            <a:off x="548640" y="4754880"/>
-            <a:ext cx="11064240" cy="1188720"/>
+            <a:off x="5029200" y="4937760"/>
+            <a:ext cx="6583680" cy="1097280"/>
           </a:xfrm>
           <a:prstGeom prst="roundRect">
             <a:avLst>
-              <a:gd name="adj" fmla="val 6154"/>
+              <a:gd name="adj" fmla="val 6667"/>
             </a:avLst>
           </a:prstGeom>
           <a:solidFill>
@@ -13383,8 +13499,8 @@
         </p:nvSpPr>
         <p:spPr>
           <a:xfrm>
-            <a:off x="822960" y="4937760"/>
-            <a:ext cx="10515600" cy="822960"/>
+            <a:off x="5257800" y="4937760"/>
+            <a:ext cx="6126480" cy="1097280"/>
           </a:xfrm>
           <a:prstGeom prst="rect">
             <a:avLst/>
@@ -13393,14 +13509,14 @@
           <a:ln/>
         </p:spPr>
         <p:txBody>
-          <a:bodyPr wrap="square" lIns="0" tIns="0" rIns="0" bIns="0" rtlCol="0" anchor="t"/>
-          <a:lstStyle/>
-          <a:p>
-            <a:pPr indent="0" marL="0">
-              <a:buNone/>
-            </a:pPr>
-            <a:r>
-              <a:rPr lang="en-US" sz="1800" b="1" dirty="0">
+          <a:bodyPr wrap="square" lIns="0" tIns="0" rIns="0" bIns="0" rtlCol="0" anchor="ctr"/>
+          <a:lstStyle/>
+          <a:p>
+            <a:pPr indent="0" marL="0">
+              <a:buNone/>
+            </a:pPr>
+            <a:r>
+              <a:rPr lang="en-US" sz="1600" b="1" dirty="0">
                 <a:solidFill>
                   <a:srgbClr val="B7791F"/>
                 </a:solidFill>
@@ -13408,13 +13524,13 @@
                 <a:ea typeface="Malgun Gothic" pitchFamily="34" charset="-122"/>
                 <a:cs typeface="Malgun Gothic" pitchFamily="34" charset="-120"/>
               </a:rPr>
-              <a:t>계기: </a:t>
-            </a:r>
-            <a:pPr indent="0" marL="0">
-              <a:buNone/>
-            </a:pPr>
-            <a:r>
-              <a:rPr lang="en-US" sz="1800" dirty="0">
+              <a:t>확인: </a:t>
+            </a:r>
+            <a:pPr indent="0" marL="0">
+              <a:buNone/>
+            </a:pPr>
+            <a:r>
+              <a:rPr lang="en-US" sz="1600" dirty="0">
                 <a:solidFill>
                   <a:srgbClr val="1B2230"/>
                 </a:solidFill>
@@ -13422,9 +13538,9 @@
                 <a:ea typeface="Malgun Gothic" pitchFamily="34" charset="-122"/>
                 <a:cs typeface="Malgun Gothic" pitchFamily="34" charset="-120"/>
               </a:rPr>
-              <a:t>음성 인식이 궁금해서 넣었다. 소음이 크지 않은 곳에서는 잘 인식한다.</a:t>
-            </a:r>
-            <a:endParaRPr lang="en-US" sz="1800" dirty="0"/>
+              <a:t>소음이 크지 않은 곳에서는 잘 인식한다 (녹음 5개 기준)</a:t>
+            </a:r>
+            <a:endParaRPr lang="en-US" sz="1600" dirty="0"/>
           </a:p>
         </p:txBody>
       </p:sp>

--- a/pythonpra/myproject/ppt/assistant_process.pptx
+++ b/pythonpra/myproject/ppt/assistant_process.pptx
@@ -954,7 +954,7 @@
           <a:p>
             <a:r>
               <a:rPr lang="en-US" dirty="0"/>
-              <a:t>[0:50 / 누적 1:10] 수어 인식 프로젝트에서 MediaPipe 손 인식을 써 본 뒤, 이걸 어디에 더 쓸 수 있을까 고민했다. 동작이 정해져 있으면 사용자가 원하는 대로 못 쓴다는 점을 문제로 잡았고, 목표는 클릭과 예/아니오를 뺀 모든 동작을 사용자가 정의하는 것.</a:t>
+              <a:t>[0:50 / 누적 1:10] 수어 인식 프로젝트에서 MediaPipe 손 인식을 써 본 뒤, 이걸 어디에 더 쓸 수 있을까 고민했다. 정해진 제스처 대신 내가 원하는 동작을 직접 붙여 보고 싶었고, 그래서 클릭과 예/아니오를 뺀 모든 동작을 사용자가 정의하는 것을 목표로 잡았다.</a:t>
             </a:r>
             <a:endParaRPr lang="en-US" dirty="0"/>
           </a:p>
@@ -4259,7 +4259,7 @@
                 <a:ea typeface="Malgun Gothic" pitchFamily="34" charset="-122"/>
                 <a:cs typeface="Malgun Gothic" pitchFamily="34" charset="-120"/>
               </a:rPr>
-              <a:t>문제 정의</a:t>
+              <a:t>출발과 목표</a:t>
             </a:r>
             <a:endParaRPr lang="en-US" sz="3200" dirty="0"/>
           </a:p>
@@ -4274,11 +4274,11 @@
         <p:spPr>
           <a:xfrm>
             <a:off x="548640" y="2011680"/>
-            <a:ext cx="2423160" cy="3108960"/>
+            <a:ext cx="5276088" cy="3108960"/>
           </a:xfrm>
           <a:prstGeom prst="roundRect">
             <a:avLst>
-              <a:gd name="adj" fmla="val 3019"/>
+              <a:gd name="adj" fmla="val 2353"/>
             </a:avLst>
           </a:prstGeom>
           <a:solidFill>
@@ -4307,8 +4307,8 @@
         </p:nvSpPr>
         <p:spPr>
           <a:xfrm>
-            <a:off x="731520" y="2240280"/>
-            <a:ext cx="2057400" cy="2651760"/>
+            <a:off x="740664" y="2240280"/>
+            <a:ext cx="4901184" cy="2651760"/>
           </a:xfrm>
           <a:prstGeom prst="rect">
             <a:avLst/>
@@ -4369,8 +4369,8 @@
         </p:nvSpPr>
         <p:spPr>
           <a:xfrm>
-            <a:off x="2971800" y="2011680"/>
-            <a:ext cx="457200" cy="3108960"/>
+            <a:off x="5824728" y="2011680"/>
+            <a:ext cx="512064" cy="3108960"/>
           </a:xfrm>
           <a:prstGeom prst="rect">
             <a:avLst/>
@@ -4408,275 +4408,12 @@
         </p:nvSpPr>
         <p:spPr>
           <a:xfrm>
-            <a:off x="3429000" y="2011680"/>
-            <a:ext cx="2423160" cy="3108960"/>
+            <a:off x="6336792" y="2011680"/>
+            <a:ext cx="5276088" cy="3108960"/>
           </a:xfrm>
           <a:prstGeom prst="roundRect">
             <a:avLst>
-              <a:gd name="adj" fmla="val 3019"/>
-            </a:avLst>
-          </a:prstGeom>
-          <a:solidFill>
-            <a:srgbClr val="FFFFFF"/>
-          </a:solidFill>
-          <a:ln w="12700">
-            <a:solidFill>
-              <a:srgbClr val="FFFFFF"/>
-            </a:solidFill>
-            <a:prstDash val="solid"/>
-          </a:ln>
-          <a:effectLst>
-            <a:outerShdw sx="100000" sy="100000" kx="0" ky="0" algn="bl" rotWithShape="0" blurRad="76200" dist="25400" dir="5400000">
-              <a:srgbClr val="000000">
-                <a:alpha val="12000"/>
-              </a:srgbClr>
-            </a:outerShdw>
-          </a:effectLst>
-        </p:spPr>
-      </p:sp>
-      <p:sp>
-        <p:nvSpPr>
-          <p:cNvPr id="8" name="Text 5"/>
-          <p:cNvSpPr txBox="1"/>
-          <p:nvPr/>
-        </p:nvSpPr>
-        <p:spPr>
-          <a:xfrm>
-            <a:off x="3611880" y="2240280"/>
-            <a:ext cx="2057400" cy="2651760"/>
-          </a:xfrm>
-          <a:prstGeom prst="rect">
-            <a:avLst/>
-          </a:prstGeom>
-          <a:noFill/>
-          <a:ln/>
-        </p:spPr>
-        <p:txBody>
-          <a:bodyPr wrap="square" lIns="0" tIns="0" rIns="0" bIns="0" rtlCol="0" anchor="t"/>
-          <a:lstStyle/>
-          <a:p>
-            <a:pPr indent="0" marL="0">
-              <a:spcAft>
-                <a:spcPts val="400"/>
-              </a:spcAft>
-              <a:buNone/>
-            </a:pPr>
-            <a:r>
-              <a:rPr lang="en-US" sz="2400" b="1" dirty="0">
-                <a:solidFill>
-                  <a:srgbClr val="1B2230"/>
-                </a:solidFill>
-                <a:latin typeface="Malgun Gothic" pitchFamily="34" charset="0"/>
-                <a:ea typeface="Malgun Gothic" pitchFamily="34" charset="-122"/>
-                <a:cs typeface="Malgun Gothic" pitchFamily="34" charset="-120"/>
-              </a:rPr>
-              <a:t>질문</a:t>
-            </a:r>
-            <a:endParaRPr lang="en-US" sz="1400" dirty="0"/>
-          </a:p>
-          <a:p>
-            <a:pPr indent="0" marL="0">
-              <a:spcAft>
-                <a:spcPts val="400"/>
-              </a:spcAft>
-              <a:buNone/>
-            </a:pPr>
-            <a:r>
-              <a:rPr lang="en-US" sz="2100" dirty="0">
-                <a:solidFill>
-                  <a:srgbClr val="1B2230"/>
-                </a:solidFill>
-                <a:latin typeface="Malgun Gothic" pitchFamily="34" charset="0"/>
-                <a:ea typeface="Malgun Gothic" pitchFamily="34" charset="-122"/>
-                <a:cs typeface="Malgun Gothic" pitchFamily="34" charset="-120"/>
-              </a:rPr>
-              <a:t>이 손 인식을 어디에 더 쓸 수 있을까</a:t>
-            </a:r>
-            <a:endParaRPr lang="en-US" sz="1400" dirty="0"/>
-          </a:p>
-        </p:txBody>
-      </p:sp>
-      <p:sp>
-        <p:nvSpPr>
-          <p:cNvPr id="9" name="Text 6"/>
-          <p:cNvSpPr txBox="1"/>
-          <p:nvPr/>
-        </p:nvSpPr>
-        <p:spPr>
-          <a:xfrm>
-            <a:off x="5852160" y="2011680"/>
-            <a:ext cx="457200" cy="3108960"/>
-          </a:xfrm>
-          <a:prstGeom prst="rect">
-            <a:avLst/>
-          </a:prstGeom>
-          <a:noFill/>
-          <a:ln/>
-        </p:spPr>
-        <p:txBody>
-          <a:bodyPr wrap="square" lIns="0" tIns="0" rIns="0" bIns="0" rtlCol="0" anchor="ctr"/>
-          <a:lstStyle/>
-          <a:p>
-            <a:pPr algn="ctr" indent="0" marL="0">
-              <a:buNone/>
-            </a:pPr>
-            <a:r>
-              <a:rPr lang="en-US" sz="2400" dirty="0">
-                <a:solidFill>
-                  <a:srgbClr val="6A7384"/>
-                </a:solidFill>
-                <a:latin typeface="Malgun Gothic" pitchFamily="34" charset="0"/>
-                <a:ea typeface="Malgun Gothic" pitchFamily="34" charset="-122"/>
-                <a:cs typeface="Malgun Gothic" pitchFamily="34" charset="-120"/>
-              </a:rPr>
-              <a:t>→</a:t>
-            </a:r>
-            <a:endParaRPr lang="en-US" sz="2400" dirty="0"/>
-          </a:p>
-        </p:txBody>
-      </p:sp>
-      <p:sp>
-        <p:nvSpPr>
-          <p:cNvPr id="10" name="Shape 7"/>
-          <p:cNvSpPr/>
-          <p:nvPr/>
-        </p:nvSpPr>
-        <p:spPr>
-          <a:xfrm>
-            <a:off x="6309360" y="2011680"/>
-            <a:ext cx="2423160" cy="3108960"/>
-          </a:xfrm>
-          <a:prstGeom prst="roundRect">
-            <a:avLst>
-              <a:gd name="adj" fmla="val 3019"/>
-            </a:avLst>
-          </a:prstGeom>
-          <a:solidFill>
-            <a:srgbClr val="FBE9E7"/>
-          </a:solidFill>
-          <a:ln w="12700">
-            <a:solidFill>
-              <a:srgbClr val="FBE9E7"/>
-            </a:solidFill>
-            <a:prstDash val="solid"/>
-          </a:ln>
-        </p:spPr>
-      </p:sp>
-      <p:sp>
-        <p:nvSpPr>
-          <p:cNvPr id="11" name="Text 8"/>
-          <p:cNvSpPr txBox="1"/>
-          <p:nvPr/>
-        </p:nvSpPr>
-        <p:spPr>
-          <a:xfrm>
-            <a:off x="6492240" y="2240280"/>
-            <a:ext cx="2057400" cy="2651760"/>
-          </a:xfrm>
-          <a:prstGeom prst="rect">
-            <a:avLst/>
-          </a:prstGeom>
-          <a:noFill/>
-          <a:ln/>
-        </p:spPr>
-        <p:txBody>
-          <a:bodyPr wrap="square" lIns="0" tIns="0" rIns="0" bIns="0" rtlCol="0" anchor="t"/>
-          <a:lstStyle/>
-          <a:p>
-            <a:pPr indent="0" marL="0">
-              <a:spcAft>
-                <a:spcPts val="400"/>
-              </a:spcAft>
-              <a:buNone/>
-            </a:pPr>
-            <a:r>
-              <a:rPr lang="en-US" sz="2400" b="1" dirty="0">
-                <a:solidFill>
-                  <a:srgbClr val="C8443A"/>
-                </a:solidFill>
-                <a:latin typeface="Malgun Gothic" pitchFamily="34" charset="0"/>
-                <a:ea typeface="Malgun Gothic" pitchFamily="34" charset="-122"/>
-                <a:cs typeface="Malgun Gothic" pitchFamily="34" charset="-120"/>
-              </a:rPr>
-              <a:t>문제</a:t>
-            </a:r>
-            <a:endParaRPr lang="en-US" sz="1400" dirty="0"/>
-          </a:p>
-          <a:p>
-            <a:pPr indent="0" marL="0">
-              <a:spcAft>
-                <a:spcPts val="400"/>
-              </a:spcAft>
-              <a:buNone/>
-            </a:pPr>
-            <a:r>
-              <a:rPr lang="en-US" sz="2100" dirty="0">
-                <a:solidFill>
-                  <a:srgbClr val="1B2230"/>
-                </a:solidFill>
-                <a:latin typeface="Malgun Gothic" pitchFamily="34" charset="0"/>
-                <a:ea typeface="Malgun Gothic" pitchFamily="34" charset="-122"/>
-                <a:cs typeface="Malgun Gothic" pitchFamily="34" charset="-120"/>
-              </a:rPr>
-              <a:t>동작이 정해져 있으면 사용자가 원하는 대로 쓸 수 없다</a:t>
-            </a:r>
-            <a:endParaRPr lang="en-US" sz="1400" dirty="0"/>
-          </a:p>
-        </p:txBody>
-      </p:sp>
-      <p:sp>
-        <p:nvSpPr>
-          <p:cNvPr id="12" name="Text 9"/>
-          <p:cNvSpPr txBox="1"/>
-          <p:nvPr/>
-        </p:nvSpPr>
-        <p:spPr>
-          <a:xfrm>
-            <a:off x="8732520" y="2011680"/>
-            <a:ext cx="457200" cy="3108960"/>
-          </a:xfrm>
-          <a:prstGeom prst="rect">
-            <a:avLst/>
-          </a:prstGeom>
-          <a:noFill/>
-          <a:ln/>
-        </p:spPr>
-        <p:txBody>
-          <a:bodyPr wrap="square" lIns="0" tIns="0" rIns="0" bIns="0" rtlCol="0" anchor="ctr"/>
-          <a:lstStyle/>
-          <a:p>
-            <a:pPr algn="ctr" indent="0" marL="0">
-              <a:buNone/>
-            </a:pPr>
-            <a:r>
-              <a:rPr lang="en-US" sz="2400" dirty="0">
-                <a:solidFill>
-                  <a:srgbClr val="6A7384"/>
-                </a:solidFill>
-                <a:latin typeface="Malgun Gothic" pitchFamily="34" charset="0"/>
-                <a:ea typeface="Malgun Gothic" pitchFamily="34" charset="-122"/>
-                <a:cs typeface="Malgun Gothic" pitchFamily="34" charset="-120"/>
-              </a:rPr>
-              <a:t>→</a:t>
-            </a:r>
-            <a:endParaRPr lang="en-US" sz="2400" dirty="0"/>
-          </a:p>
-        </p:txBody>
-      </p:sp>
-      <p:sp>
-        <p:nvSpPr>
-          <p:cNvPr id="13" name="Shape 10"/>
-          <p:cNvSpPr/>
-          <p:nvPr/>
-        </p:nvSpPr>
-        <p:spPr>
-          <a:xfrm>
-            <a:off x="9189720" y="2011680"/>
-            <a:ext cx="2423160" cy="3108960"/>
-          </a:xfrm>
-          <a:prstGeom prst="roundRect">
-            <a:avLst>
-              <a:gd name="adj" fmla="val 3019"/>
+              <a:gd name="adj" fmla="val 2353"/>
             </a:avLst>
           </a:prstGeom>
           <a:solidFill>
@@ -4692,14 +4429,14 @@
       </p:sp>
       <p:sp>
         <p:nvSpPr>
-          <p:cNvPr id="14" name="Text 11"/>
+          <p:cNvPr id="8" name="Text 5"/>
           <p:cNvSpPr txBox="1"/>
           <p:nvPr/>
         </p:nvSpPr>
         <p:spPr>
           <a:xfrm>
-            <a:off x="9372600" y="2240280"/>
-            <a:ext cx="2057400" cy="2651760"/>
+            <a:off x="6528816" y="2240280"/>
+            <a:ext cx="4901184" cy="2651760"/>
           </a:xfrm>
           <a:prstGeom prst="rect">
             <a:avLst/>
@@ -4746,7 +4483,7 @@
                 <a:ea typeface="Malgun Gothic" pitchFamily="34" charset="-122"/>
                 <a:cs typeface="Malgun Gothic" pitchFamily="34" charset="-120"/>
               </a:rPr>
-              <a:t>클릭 · 예/아니오를 뺀 모든 동작을 사용자가 직접 정의</a:t>
+              <a:t>정해진 제스처 대신 내가 원하는 동작을 직접 붙여 보고 싶어서. 클릭 · 예/아니오를 뺀 모든 동작을 직접 정의</a:t>
             </a:r>
             <a:endParaRPr lang="en-US" sz="1400" dirty="0"/>
           </a:p>
@@ -4817,7 +4554,7 @@
                 <a:ea typeface="Malgun Gothic" pitchFamily="34" charset="-122"/>
                 <a:cs typeface="Malgun Gothic" pitchFamily="34" charset="-120"/>
               </a:rPr>
-              <a:t>기존 방법과 한계</a:t>
+              <a:t>비슷한 도구와 차이</a:t>
             </a:r>
             <a:endParaRPr lang="en-US" sz="3200" dirty="0"/>
           </a:p>
@@ -6402,7 +6139,7 @@
                 <a:ea typeface="Malgun Gothic" pitchFamily="34" charset="-122"/>
                 <a:cs typeface="Malgun Gothic" pitchFamily="34" charset="-120"/>
               </a:rPr>
-              <a:t>아쉬운 점</a:t>
+              <a:t>비슷한 도구는</a:t>
             </a:r>
             <a:endParaRPr lang="en-US" sz="1400" dirty="0"/>
           </a:p>
